--- a/figures/fig1/fig1.pptx
+++ b/figures/fig1/fig1.pptx
@@ -258,7 +258,7 @@
       </p15:sldGuideLst>
     </p:ext>
     <p:ext uri="http://customooxmlschemas.google.com/">
-      <go:slidesCustomData xmlns="" xmlns:mc="http://schemas.openxmlformats.org/markup-compatibility/2006" xmlns:mv="urn:schemas-microsoft-com:mac:vml" xmlns:c="http://schemas.openxmlformats.org/drawingml/2006/chart" xmlns:dgm="http://schemas.openxmlformats.org/drawingml/2006/diagram" xmlns:o="urn:schemas-microsoft-com:office:office" xmlns:v="urn:schemas-microsoft-com:vml" xmlns:pvml="urn:schemas-microsoft-com:office:powerpoint" xmlns:com="http://schemas.openxmlformats.org/drawingml/2006/compatibility" xmlns:p14="http://schemas.microsoft.com/office/powerpoint/2010/main" xmlns:p15="http://schemas.microsoft.com/office/powerpoint/2012/main" xmlns:ahyp="http://schemas.microsoft.com/office/drawing/2018/hyperlinkcolor" xmlns:go="http://customooxmlschemas.google.com/" r:id="rId10" roundtripDataSignature="AMtx7mhiytGPk8UOxiAGs9KaAxakDbg4SQ=="/>
+      <go:slidesCustomData xmlns:go="http://customooxmlschemas.google.com/" xmlns:ahyp="http://schemas.microsoft.com/office/drawing/2018/hyperlinkcolor" xmlns:p15="http://schemas.microsoft.com/office/powerpoint/2012/main" xmlns:p14="http://schemas.microsoft.com/office/powerpoint/2010/main" xmlns:com="http://schemas.openxmlformats.org/drawingml/2006/compatibility" xmlns:pvml="urn:schemas-microsoft-com:office:powerpoint" xmlns:v="urn:schemas-microsoft-com:vml" xmlns:o="urn:schemas-microsoft-com:office:office" xmlns:dgm="http://schemas.openxmlformats.org/drawingml/2006/diagram" xmlns:c="http://schemas.openxmlformats.org/drawingml/2006/chart" xmlns:mv="urn:schemas-microsoft-com:mac:vml" xmlns:mc="http://schemas.openxmlformats.org/markup-compatibility/2006" xmlns="" r:id="rId10" roundtripDataSignature="AMtx7mhiytGPk8UOxiAGs9KaAxakDbg4SQ=="/>
     </p:ext>
   </p:extLst>
 </p:presentation>

--- a/figures/fig1/fig1.pptx
+++ b/figures/fig1/fig1.pptx
@@ -8,8 +8,8 @@
     <p:notesMasterId r:id="rId4"/>
   </p:notesMasterIdLst>
   <p:sldIdLst>
-    <p:sldId id="256" r:id="rId2"/>
-    <p:sldId id="257" r:id="rId3"/>
+    <p:sldId id="257" r:id="rId2"/>
+    <p:sldId id="256" r:id="rId3"/>
   </p:sldIdLst>
   <p:sldSz cx="36576000" cy="32918400"/>
   <p:notesSz cx="7010400" cy="9296400"/>
@@ -258,7 +258,7 @@
       </p15:sldGuideLst>
     </p:ext>
     <p:ext uri="http://customooxmlschemas.google.com/">
-      <go:slidesCustomData xmlns:go="http://customooxmlschemas.google.com/" xmlns:ahyp="http://schemas.microsoft.com/office/drawing/2018/hyperlinkcolor" xmlns:p15="http://schemas.microsoft.com/office/powerpoint/2012/main" xmlns:p14="http://schemas.microsoft.com/office/powerpoint/2010/main" xmlns:com="http://schemas.openxmlformats.org/drawingml/2006/compatibility" xmlns:pvml="urn:schemas-microsoft-com:office:powerpoint" xmlns:v="urn:schemas-microsoft-com:vml" xmlns:o="urn:schemas-microsoft-com:office:office" xmlns:dgm="http://schemas.openxmlformats.org/drawingml/2006/diagram" xmlns:c="http://schemas.openxmlformats.org/drawingml/2006/chart" xmlns:mv="urn:schemas-microsoft-com:mac:vml" xmlns:mc="http://schemas.openxmlformats.org/markup-compatibility/2006" xmlns="" r:id="rId10" roundtripDataSignature="AMtx7mhiytGPk8UOxiAGs9KaAxakDbg4SQ=="/>
+      <go:slidesCustomData xmlns="" xmlns:mc="http://schemas.openxmlformats.org/markup-compatibility/2006" xmlns:mv="urn:schemas-microsoft-com:mac:vml" xmlns:c="http://schemas.openxmlformats.org/drawingml/2006/chart" xmlns:dgm="http://schemas.openxmlformats.org/drawingml/2006/diagram" xmlns:o="urn:schemas-microsoft-com:office:office" xmlns:v="urn:schemas-microsoft-com:vml" xmlns:pvml="urn:schemas-microsoft-com:office:powerpoint" xmlns:com="http://schemas.openxmlformats.org/drawingml/2006/compatibility" xmlns:p14="http://schemas.microsoft.com/office/powerpoint/2010/main" xmlns:p15="http://schemas.microsoft.com/office/powerpoint/2012/main" xmlns:ahyp="http://schemas.microsoft.com/office/drawing/2018/hyperlinkcolor" xmlns:go="http://customooxmlschemas.google.com/" r:id="rId10" roundtripDataSignature="AMtx7mhiytGPk8UOxiAGs9KaAxakDbg4SQ=="/>
     </p:ext>
   </p:extLst>
 </p:presentation>
@@ -1462,186 +1462,6 @@
   <p:cSld>
     <p:spTree>
       <p:nvGrpSpPr>
-        <p:cNvPr id="1" name="Shape 84"/>
-        <p:cNvGrpSpPr/>
-        <p:nvPr/>
-      </p:nvGrpSpPr>
-      <p:grpSpPr>
-        <a:xfrm>
-          <a:off x="0" y="0"/>
-          <a:ext cx="0" cy="0"/>
-          <a:chOff x="0" y="0"/>
-          <a:chExt cx="0" cy="0"/>
-        </a:xfrm>
-      </p:grpSpPr>
-      <p:sp>
-        <p:nvSpPr>
-          <p:cNvPr id="85" name="Google Shape;85;p1:notes"/>
-          <p:cNvSpPr>
-            <a:spLocks noGrp="1" noRot="1" noChangeAspect="1"/>
-          </p:cNvSpPr>
-          <p:nvPr>
-            <p:ph type="sldImg" idx="2"/>
-          </p:nvPr>
-        </p:nvSpPr>
-        <p:spPr>
-          <a:xfrm>
-            <a:off x="1568450" y="696913"/>
-            <a:ext cx="3873500" cy="3486150"/>
-          </a:xfrm>
-          <a:custGeom>
-            <a:avLst/>
-            <a:gdLst/>
-            <a:ahLst/>
-            <a:cxnLst/>
-            <a:rect l="l" t="t" r="r" b="b"/>
-            <a:pathLst>
-              <a:path w="120000" h="120000" extrusionOk="0">
-                <a:moveTo>
-                  <a:pt x="0" y="0"/>
-                </a:moveTo>
-                <a:lnTo>
-                  <a:pt x="120000" y="0"/>
-                </a:lnTo>
-                <a:lnTo>
-                  <a:pt x="120000" y="120000"/>
-                </a:lnTo>
-                <a:lnTo>
-                  <a:pt x="0" y="120000"/>
-                </a:lnTo>
-                <a:close/>
-              </a:path>
-            </a:pathLst>
-          </a:custGeom>
-          <a:noFill/>
-          <a:ln w="9525" cap="flat" cmpd="sng">
-            <a:solidFill>
-              <a:srgbClr val="000000"/>
-            </a:solidFill>
-            <a:prstDash val="solid"/>
-            <a:miter lim="800000"/>
-            <a:headEnd type="none" w="sm" len="sm"/>
-            <a:tailEnd type="none" w="sm" len="sm"/>
-          </a:ln>
-        </p:spPr>
-      </p:sp>
-      <p:sp>
-        <p:nvSpPr>
-          <p:cNvPr id="86" name="Google Shape;86;p1:notes"/>
-          <p:cNvSpPr txBox="1">
-            <a:spLocks noGrp="1"/>
-          </p:cNvSpPr>
-          <p:nvPr>
-            <p:ph type="body" idx="1"/>
-          </p:nvPr>
-        </p:nvSpPr>
-        <p:spPr>
-          <a:xfrm>
-            <a:off x="701675" y="4416425"/>
-            <a:ext cx="5607050" cy="4183063"/>
-          </a:xfrm>
-          <a:prstGeom prst="rect">
-            <a:avLst/>
-          </a:prstGeom>
-          <a:noFill/>
-          <a:ln>
-            <a:noFill/>
-          </a:ln>
-        </p:spPr>
-        <p:txBody>
-          <a:bodyPr spcFirstLastPara="1" wrap="square" lIns="93150" tIns="46575" rIns="93150" bIns="46575" anchor="t" anchorCtr="0">
-            <a:noAutofit/>
-          </a:bodyPr>
-          <a:lstStyle/>
-          <a:p>
-            <a:pPr marL="0" lvl="0" indent="0" algn="l" rtl="0">
-              <a:spcBef>
-                <a:spcPts val="0"/>
-              </a:spcBef>
-              <a:spcAft>
-                <a:spcPts val="0"/>
-              </a:spcAft>
-              <a:buNone/>
-            </a:pPr>
-            <a:endParaRPr dirty="0"/>
-          </a:p>
-        </p:txBody>
-      </p:sp>
-      <p:sp>
-        <p:nvSpPr>
-          <p:cNvPr id="87" name="Google Shape;87;p1:notes"/>
-          <p:cNvSpPr txBox="1">
-            <a:spLocks noGrp="1"/>
-          </p:cNvSpPr>
-          <p:nvPr>
-            <p:ph type="sldNum" idx="12"/>
-          </p:nvPr>
-        </p:nvSpPr>
-        <p:spPr>
-          <a:xfrm>
-            <a:off x="3970338" y="8829675"/>
-            <a:ext cx="3038475" cy="465138"/>
-          </a:xfrm>
-          <a:prstGeom prst="rect">
-            <a:avLst/>
-          </a:prstGeom>
-          <a:noFill/>
-          <a:ln>
-            <a:noFill/>
-          </a:ln>
-        </p:spPr>
-        <p:txBody>
-          <a:bodyPr spcFirstLastPara="1" wrap="square" lIns="93150" tIns="46575" rIns="93150" bIns="46575" anchor="b" anchorCtr="0">
-            <a:noAutofit/>
-          </a:bodyPr>
-          <a:lstStyle/>
-          <a:p>
-            <a:pPr marL="0" marR="0" lvl="0" indent="0" algn="r" rtl="0">
-              <a:spcBef>
-                <a:spcPts val="0"/>
-              </a:spcBef>
-              <a:spcAft>
-                <a:spcPts val="0"/>
-              </a:spcAft>
-              <a:buNone/>
-            </a:pPr>
-            <a:fld id="{00000000-1234-1234-1234-123412341234}" type="slidenum">
-              <a:rPr lang="en-US" sz="1200" b="0" i="0" u="none" strike="noStrike" cap="none">
-                <a:solidFill>
-                  <a:schemeClr val="dk1"/>
-                </a:solidFill>
-                <a:latin typeface="Calibri"/>
-                <a:ea typeface="Calibri"/>
-                <a:cs typeface="Calibri"/>
-                <a:sym typeface="Calibri"/>
-              </a:rPr>
-              <a:t>1</a:t>
-            </a:fld>
-            <a:endParaRPr sz="1200" b="0" i="0" u="none" strike="noStrike" cap="none">
-              <a:solidFill>
-                <a:schemeClr val="dk1"/>
-              </a:solidFill>
-              <a:latin typeface="Calibri"/>
-              <a:ea typeface="Calibri"/>
-              <a:cs typeface="Calibri"/>
-              <a:sym typeface="Calibri"/>
-            </a:endParaRPr>
-          </a:p>
-        </p:txBody>
-      </p:sp>
-    </p:spTree>
-  </p:cSld>
-  <p:clrMapOvr>
-    <a:masterClrMapping/>
-  </p:clrMapOvr>
-</p:notes>
-</file>
-
-<file path=ppt/notesSlides/notesSlide2.xml><?xml version="1.0" encoding="utf-8"?>
-<p:notes xmlns:a="http://schemas.openxmlformats.org/drawingml/2006/main" xmlns:r="http://schemas.openxmlformats.org/officeDocument/2006/relationships" xmlns:p="http://schemas.openxmlformats.org/presentationml/2006/main" showMasterSp="0" showMasterPhAnim="0">
-  <p:cSld>
-    <p:spTree>
-      <p:nvGrpSpPr>
         <p:cNvPr id="1" name="Shape 84">
           <a:extLst>
             <a:ext uri="{FF2B5EF4-FFF2-40B4-BE49-F238E27FC236}">
@@ -1819,7 +1639,7 @@
                 <a:cs typeface="Calibri"/>
                 <a:sym typeface="Calibri"/>
               </a:rPr>
-              <a:t>2</a:t>
+              <a:t>1</a:t>
             </a:fld>
             <a:endParaRPr sz="1200" b="0" i="0" u="none" strike="noStrike" cap="none">
               <a:solidFill>
@@ -1839,6 +1659,186 @@
         <p14:creationId xmlns:p14="http://schemas.microsoft.com/office/powerpoint/2010/main" val="1394582138"/>
       </p:ext>
     </p:extLst>
+  </p:cSld>
+  <p:clrMapOvr>
+    <a:masterClrMapping/>
+  </p:clrMapOvr>
+</p:notes>
+</file>
+
+<file path=ppt/notesSlides/notesSlide2.xml><?xml version="1.0" encoding="utf-8"?>
+<p:notes xmlns:a="http://schemas.openxmlformats.org/drawingml/2006/main" xmlns:r="http://schemas.openxmlformats.org/officeDocument/2006/relationships" xmlns:p="http://schemas.openxmlformats.org/presentationml/2006/main" showMasterSp="0" showMasterPhAnim="0">
+  <p:cSld>
+    <p:spTree>
+      <p:nvGrpSpPr>
+        <p:cNvPr id="1" name="Shape 84"/>
+        <p:cNvGrpSpPr/>
+        <p:nvPr/>
+      </p:nvGrpSpPr>
+      <p:grpSpPr>
+        <a:xfrm>
+          <a:off x="0" y="0"/>
+          <a:ext cx="0" cy="0"/>
+          <a:chOff x="0" y="0"/>
+          <a:chExt cx="0" cy="0"/>
+        </a:xfrm>
+      </p:grpSpPr>
+      <p:sp>
+        <p:nvSpPr>
+          <p:cNvPr id="85" name="Google Shape;85;p1:notes"/>
+          <p:cNvSpPr>
+            <a:spLocks noGrp="1" noRot="1" noChangeAspect="1"/>
+          </p:cNvSpPr>
+          <p:nvPr>
+            <p:ph type="sldImg" idx="2"/>
+          </p:nvPr>
+        </p:nvSpPr>
+        <p:spPr>
+          <a:xfrm>
+            <a:off x="1568450" y="696913"/>
+            <a:ext cx="3873500" cy="3486150"/>
+          </a:xfrm>
+          <a:custGeom>
+            <a:avLst/>
+            <a:gdLst/>
+            <a:ahLst/>
+            <a:cxnLst/>
+            <a:rect l="l" t="t" r="r" b="b"/>
+            <a:pathLst>
+              <a:path w="120000" h="120000" extrusionOk="0">
+                <a:moveTo>
+                  <a:pt x="0" y="0"/>
+                </a:moveTo>
+                <a:lnTo>
+                  <a:pt x="120000" y="0"/>
+                </a:lnTo>
+                <a:lnTo>
+                  <a:pt x="120000" y="120000"/>
+                </a:lnTo>
+                <a:lnTo>
+                  <a:pt x="0" y="120000"/>
+                </a:lnTo>
+                <a:close/>
+              </a:path>
+            </a:pathLst>
+          </a:custGeom>
+          <a:noFill/>
+          <a:ln w="9525" cap="flat" cmpd="sng">
+            <a:solidFill>
+              <a:srgbClr val="000000"/>
+            </a:solidFill>
+            <a:prstDash val="solid"/>
+            <a:miter lim="800000"/>
+            <a:headEnd type="none" w="sm" len="sm"/>
+            <a:tailEnd type="none" w="sm" len="sm"/>
+          </a:ln>
+        </p:spPr>
+      </p:sp>
+      <p:sp>
+        <p:nvSpPr>
+          <p:cNvPr id="86" name="Google Shape;86;p1:notes"/>
+          <p:cNvSpPr txBox="1">
+            <a:spLocks noGrp="1"/>
+          </p:cNvSpPr>
+          <p:nvPr>
+            <p:ph type="body" idx="1"/>
+          </p:nvPr>
+        </p:nvSpPr>
+        <p:spPr>
+          <a:xfrm>
+            <a:off x="701675" y="4416425"/>
+            <a:ext cx="5607050" cy="4183063"/>
+          </a:xfrm>
+          <a:prstGeom prst="rect">
+            <a:avLst/>
+          </a:prstGeom>
+          <a:noFill/>
+          <a:ln>
+            <a:noFill/>
+          </a:ln>
+        </p:spPr>
+        <p:txBody>
+          <a:bodyPr spcFirstLastPara="1" wrap="square" lIns="93150" tIns="46575" rIns="93150" bIns="46575" anchor="t" anchorCtr="0">
+            <a:noAutofit/>
+          </a:bodyPr>
+          <a:lstStyle/>
+          <a:p>
+            <a:pPr marL="0" lvl="0" indent="0" algn="l" rtl="0">
+              <a:spcBef>
+                <a:spcPts val="0"/>
+              </a:spcBef>
+              <a:spcAft>
+                <a:spcPts val="0"/>
+              </a:spcAft>
+              <a:buNone/>
+            </a:pPr>
+            <a:endParaRPr dirty="0"/>
+          </a:p>
+        </p:txBody>
+      </p:sp>
+      <p:sp>
+        <p:nvSpPr>
+          <p:cNvPr id="87" name="Google Shape;87;p1:notes"/>
+          <p:cNvSpPr txBox="1">
+            <a:spLocks noGrp="1"/>
+          </p:cNvSpPr>
+          <p:nvPr>
+            <p:ph type="sldNum" idx="12"/>
+          </p:nvPr>
+        </p:nvSpPr>
+        <p:spPr>
+          <a:xfrm>
+            <a:off x="3970338" y="8829675"/>
+            <a:ext cx="3038475" cy="465138"/>
+          </a:xfrm>
+          <a:prstGeom prst="rect">
+            <a:avLst/>
+          </a:prstGeom>
+          <a:noFill/>
+          <a:ln>
+            <a:noFill/>
+          </a:ln>
+        </p:spPr>
+        <p:txBody>
+          <a:bodyPr spcFirstLastPara="1" wrap="square" lIns="93150" tIns="46575" rIns="93150" bIns="46575" anchor="b" anchorCtr="0">
+            <a:noAutofit/>
+          </a:bodyPr>
+          <a:lstStyle/>
+          <a:p>
+            <a:pPr marL="0" marR="0" lvl="0" indent="0" algn="r" rtl="0">
+              <a:spcBef>
+                <a:spcPts val="0"/>
+              </a:spcBef>
+              <a:spcAft>
+                <a:spcPts val="0"/>
+              </a:spcAft>
+              <a:buNone/>
+            </a:pPr>
+            <a:fld id="{00000000-1234-1234-1234-123412341234}" type="slidenum">
+              <a:rPr lang="en-US" sz="1200" b="0" i="0" u="none" strike="noStrike" cap="none">
+                <a:solidFill>
+                  <a:schemeClr val="dk1"/>
+                </a:solidFill>
+                <a:latin typeface="Calibri"/>
+                <a:ea typeface="Calibri"/>
+                <a:cs typeface="Calibri"/>
+                <a:sym typeface="Calibri"/>
+              </a:rPr>
+              <a:t>2</a:t>
+            </a:fld>
+            <a:endParaRPr sz="1200" b="0" i="0" u="none" strike="noStrike" cap="none">
+              <a:solidFill>
+                <a:schemeClr val="dk1"/>
+              </a:solidFill>
+              <a:latin typeface="Calibri"/>
+              <a:ea typeface="Calibri"/>
+              <a:cs typeface="Calibri"/>
+              <a:sym typeface="Calibri"/>
+            </a:endParaRPr>
+          </a:p>
+        </p:txBody>
+      </p:sp>
+    </p:spTree>
   </p:cSld>
   <p:clrMapOvr>
     <a:masterClrMapping/>
@@ -12824,6 +12824,86 @@
     </p:bg>
     <p:spTree>
       <p:nvGrpSpPr>
+        <p:cNvPr id="1" name="Shape 88">
+          <a:extLst>
+            <a:ext uri="{FF2B5EF4-FFF2-40B4-BE49-F238E27FC236}">
+              <a16:creationId xmlns:a16="http://schemas.microsoft.com/office/drawing/2014/main" id="{DB6041BE-7EEB-832C-5DBE-D4E76D7FBF94}"/>
+            </a:ext>
+          </a:extLst>
+        </p:cNvPr>
+        <p:cNvGrpSpPr/>
+        <p:nvPr/>
+      </p:nvGrpSpPr>
+      <p:grpSpPr>
+        <a:xfrm>
+          <a:off x="0" y="0"/>
+          <a:ext cx="0" cy="0"/>
+          <a:chOff x="0" y="0"/>
+          <a:chExt cx="0" cy="0"/>
+        </a:xfrm>
+      </p:grpSpPr>
+      <p:pic>
+        <p:nvPicPr>
+          <p:cNvPr id="3" name="Graphic 2">
+            <a:extLst>
+              <a:ext uri="{FF2B5EF4-FFF2-40B4-BE49-F238E27FC236}">
+                <a16:creationId xmlns:a16="http://schemas.microsoft.com/office/drawing/2014/main" id="{DC340D88-C69B-6829-6024-28783F8047F5}"/>
+              </a:ext>
+            </a:extLst>
+          </p:cNvPr>
+          <p:cNvPicPr>
+            <a:picLocks noChangeAspect="1"/>
+          </p:cNvPicPr>
+          <p:nvPr/>
+        </p:nvPicPr>
+        <p:blipFill>
+          <a:blip>
+            <a:extLst>
+              <a:ext uri="{96DAC541-7B7A-43D3-8B79-37D633B846F1}">
+                <asvg:svgBlip xmlns:asvg="http://schemas.microsoft.com/office/drawing/2016/SVG/main" r:embed="rId3"/>
+              </a:ext>
+            </a:extLst>
+          </a:blip>
+          <a:stretch>
+            <a:fillRect/>
+          </a:stretch>
+        </p:blipFill>
+        <p:spPr>
+          <a:xfrm>
+            <a:off x="0" y="5041317"/>
+            <a:ext cx="36576000" cy="22835765"/>
+          </a:xfrm>
+          <a:prstGeom prst="rect">
+            <a:avLst/>
+          </a:prstGeom>
+        </p:spPr>
+      </p:pic>
+    </p:spTree>
+    <p:extLst>
+      <p:ext uri="{BB962C8B-B14F-4D97-AF65-F5344CB8AC3E}">
+        <p14:creationId xmlns:p14="http://schemas.microsoft.com/office/powerpoint/2010/main" val="2765723133"/>
+      </p:ext>
+    </p:extLst>
+  </p:cSld>
+  <p:clrMapOvr>
+    <a:masterClrMapping/>
+  </p:clrMapOvr>
+</p:sld>
+</file>
+
+<file path=ppt/slides/slide2.xml><?xml version="1.0" encoding="utf-8"?>
+<p:sld xmlns:a="http://schemas.openxmlformats.org/drawingml/2006/main" xmlns:r="http://schemas.openxmlformats.org/officeDocument/2006/relationships" xmlns:p="http://schemas.openxmlformats.org/presentationml/2006/main">
+  <p:cSld>
+    <p:bg>
+      <p:bgPr>
+        <a:solidFill>
+          <a:schemeClr val="lt1"/>
+        </a:solidFill>
+        <a:effectLst/>
+      </p:bgPr>
+    </p:bg>
+    <p:spTree>
+      <p:nvGrpSpPr>
         <p:cNvPr id="1" name="Shape 88"/>
         <p:cNvGrpSpPr/>
         <p:nvPr/>
@@ -12851,928 +12931,28 @@
           <p:nvPr/>
         </p:nvPicPr>
         <p:blipFill>
-          <a:blip r:embed="rId3">
+          <a:blip>
             <a:extLst>
               <a:ext uri="{96DAC541-7B7A-43D3-8B79-37D633B846F1}">
-                <asvg:svgBlip xmlns:asvg="http://schemas.microsoft.com/office/drawing/2016/SVG/main" r:embed="rId4"/>
+                <asvg:svgBlip xmlns:asvg="http://schemas.microsoft.com/office/drawing/2016/SVG/main" r:embed="rId3"/>
               </a:ext>
             </a:extLst>
           </a:blip>
+          <a:srcRect l="12004" b="19421"/>
           <a:stretch>
             <a:fillRect/>
           </a:stretch>
         </p:blipFill>
         <p:spPr>
           <a:xfrm>
-            <a:off x="0" y="9853684"/>
-            <a:ext cx="36576000" cy="23064716"/>
+            <a:off x="4390568" y="9853684"/>
+            <a:ext cx="32185431" cy="18585318"/>
           </a:xfrm>
           <a:prstGeom prst="rect">
             <a:avLst/>
           </a:prstGeom>
         </p:spPr>
       </p:pic>
-      <p:sp>
-        <p:nvSpPr>
-          <p:cNvPr id="107" name="TextBox 106">
-            <a:extLst>
-              <a:ext uri="{FF2B5EF4-FFF2-40B4-BE49-F238E27FC236}">
-                <a16:creationId xmlns:a16="http://schemas.microsoft.com/office/drawing/2014/main" id="{EC4AC040-3EC5-83A5-1CC6-B77448314524}"/>
-              </a:ext>
-            </a:extLst>
-          </p:cNvPr>
-          <p:cNvSpPr txBox="1"/>
-          <p:nvPr/>
-        </p:nvSpPr>
-        <p:spPr>
-          <a:xfrm>
-            <a:off x="-15997639" y="13159182"/>
-            <a:ext cx="11421278" cy="2516073"/>
-          </a:xfrm>
-          <a:prstGeom prst="rect">
-            <a:avLst/>
-          </a:prstGeom>
-          <a:noFill/>
-        </p:spPr>
-        <p:txBody>
-          <a:bodyPr wrap="square" rtlCol="0">
-            <a:spAutoFit/>
-          </a:bodyPr>
-          <a:lstStyle/>
-          <a:p>
-            <a:pPr rtl="0">
-              <a:lnSpc>
-                <a:spcPts val="2700"/>
-              </a:lnSpc>
-            </a:pPr>
-            <a:r>
-              <a:rPr lang="en-US" sz="2400" i="0" u="none" strike="noStrike" dirty="0">
-                <a:solidFill>
-                  <a:schemeClr val="tx1">
-                    <a:lumMod val="65000"/>
-                    <a:lumOff val="35000"/>
-                  </a:schemeClr>
-                </a:solidFill>
-                <a:effectLst/>
-                <a:latin typeface="Arial" panose="020B0604020202020204" pitchFamily="34" charset="0"/>
-              </a:rPr>
-              <a:t>Chromosome size vs gene count for all chromosomes in the domestic cattle </a:t>
-            </a:r>
-            <a:r>
-              <a:rPr lang="en-US" sz="2400" dirty="0">
-                <a:solidFill>
-                  <a:schemeClr val="tx1">
-                    <a:lumMod val="65000"/>
-                    <a:lumOff val="35000"/>
-                  </a:schemeClr>
-                </a:solidFill>
-                <a:latin typeface="Arial" panose="020B0604020202020204" pitchFamily="34" charset="0"/>
-              </a:rPr>
-              <a:t>(coral</a:t>
-            </a:r>
-            <a:r>
-              <a:rPr lang="en-US" sz="2400" i="0" u="none" strike="noStrike" dirty="0">
-                <a:solidFill>
-                  <a:schemeClr val="tx1">
-                    <a:lumMod val="65000"/>
-                    <a:lumOff val="35000"/>
-                  </a:schemeClr>
-                </a:solidFill>
-                <a:effectLst/>
-                <a:latin typeface="Arial" panose="020B0604020202020204" pitchFamily="34" charset="0"/>
-              </a:rPr>
-              <a:t>) and North American deer mouse (</a:t>
-            </a:r>
-            <a:r>
-              <a:rPr lang="en-US" sz="2400" dirty="0">
-                <a:solidFill>
-                  <a:schemeClr val="tx1">
-                    <a:lumMod val="65000"/>
-                    <a:lumOff val="35000"/>
-                  </a:schemeClr>
-                </a:solidFill>
-                <a:latin typeface="Arial" panose="020B0604020202020204" pitchFamily="34" charset="0"/>
-              </a:rPr>
-              <a:t>blue</a:t>
-            </a:r>
-            <a:r>
-              <a:rPr lang="en-US" sz="2400" i="0" u="none" strike="noStrike" dirty="0">
-                <a:solidFill>
-                  <a:schemeClr val="tx1">
-                    <a:lumMod val="65000"/>
-                    <a:lumOff val="35000"/>
-                  </a:schemeClr>
-                </a:solidFill>
-                <a:effectLst/>
-                <a:latin typeface="Arial" panose="020B0604020202020204" pitchFamily="34" charset="0"/>
-              </a:rPr>
-              <a:t>). </a:t>
-            </a:r>
-            <a:r>
-              <a:rPr lang="en-US" sz="2400" b="0" i="0" u="none" strike="noStrike" dirty="0">
-                <a:solidFill>
-                  <a:schemeClr val="tx1">
-                    <a:lumMod val="65000"/>
-                    <a:lumOff val="35000"/>
-                  </a:schemeClr>
-                </a:solidFill>
-                <a:effectLst/>
-                <a:latin typeface="Arial" panose="020B0604020202020204" pitchFamily="34" charset="0"/>
-              </a:rPr>
-              <a:t>Trendlines depict simple </a:t>
-            </a:r>
-            <a:r>
-              <a:rPr lang="en-US" sz="2400" dirty="0">
-                <a:solidFill>
-                  <a:schemeClr val="tx1">
-                    <a:lumMod val="65000"/>
-                    <a:lumOff val="35000"/>
-                  </a:schemeClr>
-                </a:solidFill>
-                <a:latin typeface="Arial" panose="020B0604020202020204" pitchFamily="34" charset="0"/>
-              </a:rPr>
-              <a:t>linear regressions for each genome. Data points for the deer mouse show less deviation than those for the cow from each species' respective trendline, indicating more gene density variation in the cow genome. In this study, gene density variation is represented by the R</a:t>
-            </a:r>
-            <a:r>
-              <a:rPr lang="en-US" sz="2400" baseline="30000" dirty="0">
-                <a:solidFill>
-                  <a:schemeClr val="tx1">
-                    <a:lumMod val="65000"/>
-                    <a:lumOff val="35000"/>
-                  </a:schemeClr>
-                </a:solidFill>
-                <a:latin typeface="Arial" panose="020B0604020202020204" pitchFamily="34" charset="0"/>
-              </a:rPr>
-              <a:t>2</a:t>
-            </a:r>
-            <a:r>
-              <a:rPr lang="en-US" sz="2400" dirty="0">
-                <a:solidFill>
-                  <a:schemeClr val="tx1">
-                    <a:lumMod val="65000"/>
-                    <a:lumOff val="35000"/>
-                  </a:schemeClr>
-                </a:solidFill>
-                <a:latin typeface="Arial" panose="020B0604020202020204" pitchFamily="34" charset="0"/>
-              </a:rPr>
-              <a:t> value of a genome’s linear regression model (see legend); chromosome size explains 73% of variance in deer mouse gene count but only 36% in cow.</a:t>
-            </a:r>
-          </a:p>
-        </p:txBody>
-      </p:sp>
-      <p:grpSp>
-        <p:nvGrpSpPr>
-          <p:cNvPr id="124" name="Group 123">
-            <a:extLst>
-              <a:ext uri="{FF2B5EF4-FFF2-40B4-BE49-F238E27FC236}">
-                <a16:creationId xmlns:a16="http://schemas.microsoft.com/office/drawing/2014/main" id="{4F8C8655-42F2-35AE-6D3F-8F839ECCE048}"/>
-              </a:ext>
-            </a:extLst>
-          </p:cNvPr>
-          <p:cNvGrpSpPr/>
-          <p:nvPr/>
-        </p:nvGrpSpPr>
-        <p:grpSpPr>
-          <a:xfrm>
-            <a:off x="-17394717" y="1220798"/>
-            <a:ext cx="13212973" cy="11842883"/>
-            <a:chOff x="955175" y="18084800"/>
-            <a:chExt cx="12189299" cy="10706134"/>
-          </a:xfrm>
-        </p:grpSpPr>
-        <p:grpSp>
-          <p:nvGrpSpPr>
-            <p:cNvPr id="106" name="Group 105">
-              <a:extLst>
-                <a:ext uri="{FF2B5EF4-FFF2-40B4-BE49-F238E27FC236}">
-                  <a16:creationId xmlns:a16="http://schemas.microsoft.com/office/drawing/2014/main" id="{94CC66FC-7AB2-BBCD-D21C-8D38B946F50E}"/>
-                </a:ext>
-              </a:extLst>
-            </p:cNvPr>
-            <p:cNvGrpSpPr/>
-            <p:nvPr/>
-          </p:nvGrpSpPr>
-          <p:grpSpPr>
-            <a:xfrm>
-              <a:off x="955175" y="18084800"/>
-              <a:ext cx="12189299" cy="10706134"/>
-              <a:chOff x="599337" y="17830633"/>
-              <a:chExt cx="12189299" cy="10706134"/>
-            </a:xfrm>
-          </p:grpSpPr>
-          <p:sp>
-            <p:nvSpPr>
-              <p:cNvPr id="86" name="TextBox 85">
-                <a:extLst>
-                  <a:ext uri="{FF2B5EF4-FFF2-40B4-BE49-F238E27FC236}">
-                    <a16:creationId xmlns:a16="http://schemas.microsoft.com/office/drawing/2014/main" id="{5F9CFFAD-A7CB-C66F-5C1F-CFCEF64DD67A}"/>
-                  </a:ext>
-                </a:extLst>
-              </p:cNvPr>
-              <p:cNvSpPr txBox="1"/>
-              <p:nvPr/>
-            </p:nvSpPr>
-            <p:spPr>
-              <a:xfrm rot="16200000">
-                <a:off x="-1460261" y="22192159"/>
-                <a:ext cx="4642415" cy="523220"/>
-              </a:xfrm>
-              <a:prstGeom prst="rect">
-                <a:avLst/>
-              </a:prstGeom>
-              <a:noFill/>
-            </p:spPr>
-            <p:txBody>
-              <a:bodyPr wrap="square" rtlCol="0">
-                <a:spAutoFit/>
-              </a:bodyPr>
-              <a:lstStyle/>
-              <a:p>
-                <a:pPr algn="ctr"/>
-                <a:r>
-                  <a:rPr lang="en-US" sz="2800" dirty="0"/>
-                  <a:t>Gene count (thousands)</a:t>
-                </a:r>
-              </a:p>
-            </p:txBody>
-          </p:sp>
-          <p:sp>
-            <p:nvSpPr>
-              <p:cNvPr id="87" name="TextBox 86">
-                <a:extLst>
-                  <a:ext uri="{FF2B5EF4-FFF2-40B4-BE49-F238E27FC236}">
-                    <a16:creationId xmlns:a16="http://schemas.microsoft.com/office/drawing/2014/main" id="{D01E5D62-B6DA-AF6A-8BDE-CB0B47AEC004}"/>
-                  </a:ext>
-                </a:extLst>
-              </p:cNvPr>
-              <p:cNvSpPr txBox="1"/>
-              <p:nvPr/>
-            </p:nvSpPr>
-            <p:spPr>
-              <a:xfrm>
-                <a:off x="4945176" y="28013547"/>
-                <a:ext cx="4642415" cy="523220"/>
-              </a:xfrm>
-              <a:prstGeom prst="rect">
-                <a:avLst/>
-              </a:prstGeom>
-              <a:noFill/>
-            </p:spPr>
-            <p:txBody>
-              <a:bodyPr wrap="square" rtlCol="0">
-                <a:spAutoFit/>
-              </a:bodyPr>
-              <a:lstStyle/>
-              <a:p>
-                <a:pPr algn="ctr"/>
-                <a:r>
-                  <a:rPr lang="en-US" sz="2800" dirty="0"/>
-                  <a:t>Chromosome size (Mb)</a:t>
-                </a:r>
-              </a:p>
-            </p:txBody>
-          </p:sp>
-          <p:pic>
-            <p:nvPicPr>
-              <p:cNvPr id="105" name="Graphic 104">
-                <a:extLst>
-                  <a:ext uri="{FF2B5EF4-FFF2-40B4-BE49-F238E27FC236}">
-                    <a16:creationId xmlns:a16="http://schemas.microsoft.com/office/drawing/2014/main" id="{441D4981-27E6-242D-EDBF-0CDFB030B4F2}"/>
-                  </a:ext>
-                </a:extLst>
-              </p:cNvPr>
-              <p:cNvPicPr>
-                <a:picLocks noChangeAspect="1"/>
-              </p:cNvPicPr>
-              <p:nvPr/>
-            </p:nvPicPr>
-            <p:blipFill>
-              <a:blip r:embed="rId5">
-                <a:extLst>
-                  <a:ext uri="{96DAC541-7B7A-43D3-8B79-37D633B846F1}">
-                    <asvg:svgBlip xmlns:asvg="http://schemas.microsoft.com/office/drawing/2016/SVG/main" r:embed="rId6"/>
-                  </a:ext>
-                </a:extLst>
-              </a:blip>
-              <a:srcRect l="6283" t="11160" r="5309" b="8868"/>
-              <a:stretch/>
-            </p:blipFill>
-            <p:spPr>
-              <a:xfrm>
-                <a:off x="1308081" y="17830633"/>
-                <a:ext cx="11480555" cy="10108153"/>
-              </a:xfrm>
-              <a:prstGeom prst="rect">
-                <a:avLst/>
-              </a:prstGeom>
-            </p:spPr>
-          </p:pic>
-        </p:grpSp>
-        <p:grpSp>
-          <p:nvGrpSpPr>
-            <p:cNvPr id="114" name="Group 113">
-              <a:extLst>
-                <a:ext uri="{FF2B5EF4-FFF2-40B4-BE49-F238E27FC236}">
-                  <a16:creationId xmlns:a16="http://schemas.microsoft.com/office/drawing/2014/main" id="{57412D37-2806-83D8-9043-F12033CE2A38}"/>
-                </a:ext>
-              </a:extLst>
-            </p:cNvPr>
-            <p:cNvGrpSpPr/>
-            <p:nvPr/>
-          </p:nvGrpSpPr>
-          <p:grpSpPr>
-            <a:xfrm>
-              <a:off x="2921747" y="18823744"/>
-              <a:ext cx="6498611" cy="877050"/>
-              <a:chOff x="3444818" y="18893077"/>
-              <a:chExt cx="6498611" cy="877050"/>
-            </a:xfrm>
-          </p:grpSpPr>
-          <p:sp>
-            <p:nvSpPr>
-              <p:cNvPr id="110" name="TextBox 109">
-                <a:extLst>
-                  <a:ext uri="{FF2B5EF4-FFF2-40B4-BE49-F238E27FC236}">
-                    <a16:creationId xmlns:a16="http://schemas.microsoft.com/office/drawing/2014/main" id="{5A8ACB23-81D5-F24B-5E40-C63A5D2B3B35}"/>
-                  </a:ext>
-                </a:extLst>
-              </p:cNvPr>
-              <p:cNvSpPr txBox="1"/>
-              <p:nvPr/>
-            </p:nvSpPr>
-            <p:spPr>
-              <a:xfrm>
-                <a:off x="3786542" y="18893077"/>
-                <a:ext cx="3898309" cy="422303"/>
-              </a:xfrm>
-              <a:prstGeom prst="rect">
-                <a:avLst/>
-              </a:prstGeom>
-              <a:noFill/>
-            </p:spPr>
-            <p:txBody>
-              <a:bodyPr wrap="square" rtlCol="0">
-                <a:spAutoFit/>
-              </a:bodyPr>
-              <a:lstStyle/>
-              <a:p>
-                <a:r>
-                  <a:rPr lang="en-US" sz="2300" dirty="0"/>
-                  <a:t>Domestic cattle; R</a:t>
-                </a:r>
-                <a:r>
-                  <a:rPr lang="en-US" sz="2300" baseline="30000" dirty="0"/>
-                  <a:t>2</a:t>
-                </a:r>
-                <a:r>
-                  <a:rPr lang="en-US" sz="2300" dirty="0"/>
-                  <a:t> = 0.36</a:t>
-                </a:r>
-              </a:p>
-            </p:txBody>
-          </p:sp>
-          <p:sp>
-            <p:nvSpPr>
-              <p:cNvPr id="111" name="TextBox 110">
-                <a:extLst>
-                  <a:ext uri="{FF2B5EF4-FFF2-40B4-BE49-F238E27FC236}">
-                    <a16:creationId xmlns:a16="http://schemas.microsoft.com/office/drawing/2014/main" id="{1A786EC2-3281-0B48-3F3B-4355BE863152}"/>
-                  </a:ext>
-                </a:extLst>
-              </p:cNvPr>
-              <p:cNvSpPr txBox="1"/>
-              <p:nvPr/>
-            </p:nvSpPr>
-            <p:spPr>
-              <a:xfrm>
-                <a:off x="3786541" y="19347824"/>
-                <a:ext cx="6156888" cy="422303"/>
-              </a:xfrm>
-              <a:prstGeom prst="rect">
-                <a:avLst/>
-              </a:prstGeom>
-              <a:noFill/>
-            </p:spPr>
-            <p:txBody>
-              <a:bodyPr wrap="square" rtlCol="0">
-                <a:spAutoFit/>
-              </a:bodyPr>
-              <a:lstStyle/>
-              <a:p>
-                <a:r>
-                  <a:rPr lang="en-US" sz="2300" dirty="0"/>
-                  <a:t>North American deer mouse; R</a:t>
-                </a:r>
-                <a:r>
-                  <a:rPr lang="en-US" sz="2300" baseline="30000" dirty="0"/>
-                  <a:t>2</a:t>
-                </a:r>
-                <a:r>
-                  <a:rPr lang="en-US" sz="2300" dirty="0"/>
-                  <a:t> = 0.73</a:t>
-                </a:r>
-              </a:p>
-            </p:txBody>
-          </p:sp>
-          <p:pic>
-            <p:nvPicPr>
-              <p:cNvPr id="112" name="Graphic 111">
-                <a:extLst>
-                  <a:ext uri="{FF2B5EF4-FFF2-40B4-BE49-F238E27FC236}">
-                    <a16:creationId xmlns:a16="http://schemas.microsoft.com/office/drawing/2014/main" id="{4076F19A-7C7B-D6A2-5958-E444652E1A40}"/>
-                  </a:ext>
-                </a:extLst>
-              </p:cNvPr>
-              <p:cNvPicPr>
-                <a:picLocks noChangeAspect="1"/>
-              </p:cNvPicPr>
-              <p:nvPr/>
-            </p:nvPicPr>
-            <p:blipFill>
-              <a:blip r:embed="rId5">
-                <a:extLst>
-                  <a:ext uri="{96DAC541-7B7A-43D3-8B79-37D633B846F1}">
-                    <asvg:svgBlip xmlns:asvg="http://schemas.microsoft.com/office/drawing/2016/SVG/main" r:embed="rId6"/>
-                  </a:ext>
-                </a:extLst>
-              </a:blip>
-              <a:srcRect l="19006" t="63692" r="79234" b="34436"/>
-              <a:stretch/>
-            </p:blipFill>
-            <p:spPr>
-              <a:xfrm>
-                <a:off x="3444818" y="18963164"/>
-                <a:ext cx="307686" cy="318528"/>
-              </a:xfrm>
-              <a:prstGeom prst="rect">
-                <a:avLst/>
-              </a:prstGeom>
-            </p:spPr>
-          </p:pic>
-          <p:pic>
-            <p:nvPicPr>
-              <p:cNvPr id="113" name="Graphic 112">
-                <a:extLst>
-                  <a:ext uri="{FF2B5EF4-FFF2-40B4-BE49-F238E27FC236}">
-                    <a16:creationId xmlns:a16="http://schemas.microsoft.com/office/drawing/2014/main" id="{45F828FD-9DA1-E282-7DCB-EAB7D3027410}"/>
-                  </a:ext>
-                </a:extLst>
-              </p:cNvPr>
-              <p:cNvPicPr>
-                <a:picLocks noChangeAspect="1"/>
-              </p:cNvPicPr>
-              <p:nvPr/>
-            </p:nvPicPr>
-            <p:blipFill>
-              <a:blip r:embed="rId5">
-                <a:extLst>
-                  <a:ext uri="{96DAC541-7B7A-43D3-8B79-37D633B846F1}">
-                    <asvg:svgBlip xmlns:asvg="http://schemas.microsoft.com/office/drawing/2016/SVG/main" r:embed="rId6"/>
-                  </a:ext>
-                </a:extLst>
-              </a:blip>
-              <a:srcRect l="62893" t="55244" r="35408" b="42973"/>
-              <a:stretch/>
-            </p:blipFill>
-            <p:spPr>
-              <a:xfrm>
-                <a:off x="3444818" y="19400883"/>
-                <a:ext cx="307686" cy="314328"/>
-              </a:xfrm>
-              <a:prstGeom prst="rect">
-                <a:avLst/>
-              </a:prstGeom>
-            </p:spPr>
-          </p:pic>
-        </p:grpSp>
-      </p:grpSp>
-      <p:pic>
-        <p:nvPicPr>
-          <p:cNvPr id="1026" name="Picture 2">
-            <a:extLst>
-              <a:ext uri="{FF2B5EF4-FFF2-40B4-BE49-F238E27FC236}">
-                <a16:creationId xmlns:a16="http://schemas.microsoft.com/office/drawing/2014/main" id="{511AE978-B557-330A-24D3-AE078ADBE2F2}"/>
-              </a:ext>
-            </a:extLst>
-          </p:cNvPr>
-          <p:cNvPicPr>
-            <a:picLocks noChangeAspect="1" noChangeArrowheads="1"/>
-          </p:cNvPicPr>
-          <p:nvPr/>
-        </p:nvPicPr>
-        <p:blipFill>
-          <a:blip r:embed="rId7">
-            <a:extLst>
-              <a:ext uri="{28A0092B-C50C-407E-A947-70E740481C1C}">
-                <a14:useLocalDpi xmlns:a14="http://schemas.microsoft.com/office/drawing/2010/main" val="0"/>
-              </a:ext>
-            </a:extLst>
-          </a:blip>
-          <a:srcRect/>
-          <a:stretch>
-            <a:fillRect/>
-          </a:stretch>
-        </p:blipFill>
-        <p:spPr bwMode="auto">
-          <a:xfrm>
-            <a:off x="-14201789" y="3765348"/>
-            <a:ext cx="3035762" cy="1881540"/>
-          </a:xfrm>
-          <a:prstGeom prst="rect">
-            <a:avLst/>
-          </a:prstGeom>
-          <a:noFill/>
-          <a:extLst>
-            <a:ext uri="{909E8E84-426E-40DD-AFC4-6F175D3DCCD1}">
-              <a14:hiddenFill xmlns:a14="http://schemas.microsoft.com/office/drawing/2010/main">
-                <a:solidFill>
-                  <a:srgbClr val="FFFFFF"/>
-                </a:solidFill>
-              </a14:hiddenFill>
-            </a:ext>
-          </a:extLst>
-        </p:spPr>
-      </p:pic>
-      <p:pic>
-        <p:nvPicPr>
-          <p:cNvPr id="1028" name="Picture 4">
-            <a:extLst>
-              <a:ext uri="{FF2B5EF4-FFF2-40B4-BE49-F238E27FC236}">
-                <a16:creationId xmlns:a16="http://schemas.microsoft.com/office/drawing/2014/main" id="{BB3294B8-FF29-607B-4770-CFB12F427BBD}"/>
-              </a:ext>
-            </a:extLst>
-          </p:cNvPr>
-          <p:cNvPicPr>
-            <a:picLocks noChangeAspect="1" noChangeArrowheads="1"/>
-          </p:cNvPicPr>
-          <p:nvPr/>
-        </p:nvPicPr>
-        <p:blipFill>
-          <a:blip r:embed="rId8">
-            <a:extLst>
-              <a:ext uri="{28A0092B-C50C-407E-A947-70E740481C1C}">
-                <a14:useLocalDpi xmlns:a14="http://schemas.microsoft.com/office/drawing/2010/main" val="0"/>
-              </a:ext>
-            </a:extLst>
-          </a:blip>
-          <a:srcRect/>
-          <a:stretch>
-            <a:fillRect/>
-          </a:stretch>
-        </p:blipFill>
-        <p:spPr bwMode="auto">
-          <a:xfrm>
-            <a:off x="-8515074" y="8639718"/>
-            <a:ext cx="2565400" cy="2084388"/>
-          </a:xfrm>
-          <a:prstGeom prst="rect">
-            <a:avLst/>
-          </a:prstGeom>
-          <a:noFill/>
-          <a:extLst>
-            <a:ext uri="{909E8E84-426E-40DD-AFC4-6F175D3DCCD1}">
-              <a14:hiddenFill xmlns:a14="http://schemas.microsoft.com/office/drawing/2010/main">
-                <a:solidFill>
-                  <a:srgbClr val="FFFFFF"/>
-                </a:solidFill>
-              </a14:hiddenFill>
-            </a:ext>
-          </a:extLst>
-        </p:spPr>
-      </p:pic>
-      <p:sp>
-        <p:nvSpPr>
-          <p:cNvPr id="2" name="TextBox 1">
-            <a:extLst>
-              <a:ext uri="{FF2B5EF4-FFF2-40B4-BE49-F238E27FC236}">
-                <a16:creationId xmlns:a16="http://schemas.microsoft.com/office/drawing/2014/main" id="{ED12A03F-BA88-D653-05F3-E296702E73CD}"/>
-              </a:ext>
-            </a:extLst>
-          </p:cNvPr>
-          <p:cNvSpPr txBox="1"/>
-          <p:nvPr/>
-        </p:nvSpPr>
-        <p:spPr>
-          <a:xfrm>
-            <a:off x="-4178095" y="9681912"/>
-            <a:ext cx="5346700" cy="738664"/>
-          </a:xfrm>
-          <a:prstGeom prst="rect">
-            <a:avLst/>
-          </a:prstGeom>
-          <a:noFill/>
-        </p:spPr>
-        <p:txBody>
-          <a:bodyPr wrap="square" rtlCol="0">
-            <a:spAutoFit/>
-          </a:bodyPr>
-          <a:lstStyle/>
-          <a:p>
-            <a:r>
-              <a:rPr lang="en-US" dirty="0"/>
-              <a:t>Deer mouse:</a:t>
-            </a:r>
-          </a:p>
-          <a:p>
-            <a:r>
-              <a:rPr lang="en-US" dirty="0"/>
-              <a:t>Edwin Price</a:t>
-            </a:r>
-          </a:p>
-          <a:p>
-            <a:r>
-              <a:rPr lang="en-US" dirty="0"/>
-              <a:t>https://creativecommons.org/licenses/by/4.0/</a:t>
-            </a:r>
-          </a:p>
-        </p:txBody>
-      </p:sp>
-      <p:grpSp>
-        <p:nvGrpSpPr>
-          <p:cNvPr id="19" name="Group 18">
-            <a:extLst>
-              <a:ext uri="{FF2B5EF4-FFF2-40B4-BE49-F238E27FC236}">
-                <a16:creationId xmlns:a16="http://schemas.microsoft.com/office/drawing/2014/main" id="{DEBBD469-6DF8-E957-5F78-8FD3803A34A3}"/>
-              </a:ext>
-            </a:extLst>
-          </p:cNvPr>
-          <p:cNvGrpSpPr/>
-          <p:nvPr/>
-        </p:nvGrpSpPr>
-        <p:grpSpPr>
-          <a:xfrm>
-            <a:off x="37127201" y="4625793"/>
-            <a:ext cx="15603470" cy="9791425"/>
-            <a:chOff x="20286730" y="12493591"/>
-            <a:chExt cx="11929026" cy="7584834"/>
-          </a:xfrm>
-        </p:grpSpPr>
-        <p:pic>
-          <p:nvPicPr>
-            <p:cNvPr id="6" name="Graphic 5">
-              <a:extLst>
-                <a:ext uri="{FF2B5EF4-FFF2-40B4-BE49-F238E27FC236}">
-                  <a16:creationId xmlns:a16="http://schemas.microsoft.com/office/drawing/2014/main" id="{40093147-8B33-1981-B950-5F3D6916974D}"/>
-                </a:ext>
-              </a:extLst>
-            </p:cNvPr>
-            <p:cNvPicPr>
-              <a:picLocks noChangeAspect="1"/>
-            </p:cNvPicPr>
-            <p:nvPr/>
-          </p:nvPicPr>
-          <p:blipFill>
-            <a:blip r:embed="rId9">
-              <a:extLst>
-                <a:ext uri="{96DAC541-7B7A-43D3-8B79-37D633B846F1}">
-                  <asvg:svgBlip xmlns:asvg="http://schemas.microsoft.com/office/drawing/2016/SVG/main" r:embed="rId10"/>
-                </a:ext>
-              </a:extLst>
-            </a:blip>
-            <a:srcRect l="7332" t="17571" r="6659" b="13413"/>
-            <a:stretch/>
-          </p:blipFill>
-          <p:spPr>
-            <a:xfrm>
-              <a:off x="20980400" y="12493591"/>
-              <a:ext cx="11235356" cy="6962809"/>
-            </a:xfrm>
-            <a:prstGeom prst="rect">
-              <a:avLst/>
-            </a:prstGeom>
-          </p:spPr>
-        </p:pic>
-        <p:pic>
-          <p:nvPicPr>
-            <p:cNvPr id="10" name="Graphic 9">
-              <a:extLst>
-                <a:ext uri="{FF2B5EF4-FFF2-40B4-BE49-F238E27FC236}">
-                  <a16:creationId xmlns:a16="http://schemas.microsoft.com/office/drawing/2014/main" id="{3197B40B-949A-758C-F4CD-36CD88DCE615}"/>
-                </a:ext>
-              </a:extLst>
-            </p:cNvPr>
-            <p:cNvPicPr>
-              <a:picLocks noChangeAspect="1"/>
-            </p:cNvPicPr>
-            <p:nvPr/>
-          </p:nvPicPr>
-          <p:blipFill>
-            <a:blip r:embed="rId11">
-              <a:extLst>
-                <a:ext uri="{96DAC541-7B7A-43D3-8B79-37D633B846F1}">
-                  <asvg:svgBlip xmlns:asvg="http://schemas.microsoft.com/office/drawing/2016/SVG/main" r:embed="rId12"/>
-                </a:ext>
-              </a:extLst>
-            </a:blip>
-            <a:stretch>
-              <a:fillRect/>
-            </a:stretch>
-          </p:blipFill>
-          <p:spPr>
-            <a:xfrm>
-              <a:off x="24084083" y="16500041"/>
-              <a:ext cx="1546510" cy="1485464"/>
-            </a:xfrm>
-            <a:prstGeom prst="rect">
-              <a:avLst/>
-            </a:prstGeom>
-          </p:spPr>
-        </p:pic>
-        <p:pic>
-          <p:nvPicPr>
-            <p:cNvPr id="12" name="Graphic 11">
-              <a:extLst>
-                <a:ext uri="{FF2B5EF4-FFF2-40B4-BE49-F238E27FC236}">
-                  <a16:creationId xmlns:a16="http://schemas.microsoft.com/office/drawing/2014/main" id="{66EA5418-D98F-4B81-C840-F3D933B66B70}"/>
-                </a:ext>
-              </a:extLst>
-            </p:cNvPr>
-            <p:cNvPicPr>
-              <a:picLocks noChangeAspect="1"/>
-            </p:cNvPicPr>
-            <p:nvPr/>
-          </p:nvPicPr>
-          <p:blipFill>
-            <a:blip r:embed="rId13">
-              <a:extLst>
-                <a:ext uri="{96DAC541-7B7A-43D3-8B79-37D633B846F1}">
-                  <asvg:svgBlip xmlns:asvg="http://schemas.microsoft.com/office/drawing/2016/SVG/main" r:embed="rId14"/>
-                </a:ext>
-              </a:extLst>
-            </a:blip>
-            <a:stretch>
-              <a:fillRect/>
-            </a:stretch>
-          </p:blipFill>
-          <p:spPr>
-            <a:xfrm>
-              <a:off x="30211977" y="16500041"/>
-              <a:ext cx="1494220" cy="1485464"/>
-            </a:xfrm>
-            <a:prstGeom prst="rect">
-              <a:avLst/>
-            </a:prstGeom>
-          </p:spPr>
-        </p:pic>
-        <p:sp>
-          <p:nvSpPr>
-            <p:cNvPr id="15" name="TextBox 14">
-              <a:extLst>
-                <a:ext uri="{FF2B5EF4-FFF2-40B4-BE49-F238E27FC236}">
-                  <a16:creationId xmlns:a16="http://schemas.microsoft.com/office/drawing/2014/main" id="{C41025E3-8D35-6CAE-74AC-6D46EDD9E175}"/>
-                </a:ext>
-              </a:extLst>
-            </p:cNvPr>
-            <p:cNvSpPr txBox="1"/>
-            <p:nvPr/>
-          </p:nvSpPr>
-          <p:spPr>
-            <a:xfrm>
-              <a:off x="24383120" y="18019091"/>
-              <a:ext cx="1149736" cy="357624"/>
-            </a:xfrm>
-            <a:prstGeom prst="rect">
-              <a:avLst/>
-            </a:prstGeom>
-            <a:noFill/>
-          </p:spPr>
-          <p:txBody>
-            <a:bodyPr wrap="square" rtlCol="0">
-              <a:spAutoFit/>
-            </a:bodyPr>
-            <a:lstStyle/>
-            <a:p>
-              <a:r>
-                <a:rPr lang="en-US" sz="2400" dirty="0"/>
-                <a:t>R</a:t>
-              </a:r>
-              <a:r>
-                <a:rPr lang="en-US" sz="2400" baseline="30000" dirty="0"/>
-                <a:t>2</a:t>
-              </a:r>
-              <a:r>
-                <a:rPr lang="en-US" sz="2400" dirty="0"/>
-                <a:t> = 0.79</a:t>
-              </a:r>
-            </a:p>
-          </p:txBody>
-        </p:sp>
-        <p:sp>
-          <p:nvSpPr>
-            <p:cNvPr id="16" name="TextBox 15">
-              <a:extLst>
-                <a:ext uri="{FF2B5EF4-FFF2-40B4-BE49-F238E27FC236}">
-                  <a16:creationId xmlns:a16="http://schemas.microsoft.com/office/drawing/2014/main" id="{99235D84-F1B8-CE40-810A-7939CC53F397}"/>
-                </a:ext>
-              </a:extLst>
-            </p:cNvPr>
-            <p:cNvSpPr txBox="1"/>
-            <p:nvPr/>
-          </p:nvSpPr>
-          <p:spPr>
-            <a:xfrm>
-              <a:off x="30260199" y="18014472"/>
-              <a:ext cx="1149737" cy="357624"/>
-            </a:xfrm>
-            <a:prstGeom prst="rect">
-              <a:avLst/>
-            </a:prstGeom>
-            <a:noFill/>
-          </p:spPr>
-          <p:txBody>
-            <a:bodyPr wrap="square" rtlCol="0">
-              <a:spAutoFit/>
-            </a:bodyPr>
-            <a:lstStyle/>
-            <a:p>
-              <a:r>
-                <a:rPr lang="en-US" sz="2400" dirty="0"/>
-                <a:t>R</a:t>
-              </a:r>
-              <a:r>
-                <a:rPr lang="en-US" sz="2400" baseline="30000" dirty="0"/>
-                <a:t>2</a:t>
-              </a:r>
-              <a:r>
-                <a:rPr lang="en-US" sz="2400" dirty="0"/>
-                <a:t> = 0.18</a:t>
-              </a:r>
-            </a:p>
-          </p:txBody>
-        </p:sp>
-        <p:sp>
-          <p:nvSpPr>
-            <p:cNvPr id="17" name="TextBox 16">
-              <a:extLst>
-                <a:ext uri="{FF2B5EF4-FFF2-40B4-BE49-F238E27FC236}">
-                  <a16:creationId xmlns:a16="http://schemas.microsoft.com/office/drawing/2014/main" id="{488D1D87-24C4-A8DE-C7AE-2387C0A65D38}"/>
-                </a:ext>
-              </a:extLst>
-            </p:cNvPr>
-            <p:cNvSpPr txBox="1"/>
-            <p:nvPr/>
-          </p:nvSpPr>
-          <p:spPr>
-            <a:xfrm rot="16200000">
-              <a:off x="17980673" y="15372411"/>
-              <a:ext cx="5135334" cy="523220"/>
-            </a:xfrm>
-            <a:prstGeom prst="rect">
-              <a:avLst/>
-            </a:prstGeom>
-            <a:noFill/>
-          </p:spPr>
-          <p:txBody>
-            <a:bodyPr wrap="square" rtlCol="0">
-              <a:spAutoFit/>
-            </a:bodyPr>
-            <a:lstStyle/>
-            <a:p>
-              <a:pPr algn="ctr"/>
-              <a:r>
-                <a:rPr lang="en-US" sz="2800" dirty="0"/>
-                <a:t>Gene count (thousands)</a:t>
-              </a:r>
-            </a:p>
-          </p:txBody>
-        </p:sp>
-        <p:sp>
-          <p:nvSpPr>
-            <p:cNvPr id="18" name="TextBox 17">
-              <a:extLst>
-                <a:ext uri="{FF2B5EF4-FFF2-40B4-BE49-F238E27FC236}">
-                  <a16:creationId xmlns:a16="http://schemas.microsoft.com/office/drawing/2014/main" id="{19929FC9-2050-C8BD-778D-3A8C611F3306}"/>
-                </a:ext>
-              </a:extLst>
-            </p:cNvPr>
-            <p:cNvSpPr txBox="1"/>
-            <p:nvPr/>
-          </p:nvSpPr>
-          <p:spPr>
-            <a:xfrm>
-              <a:off x="24196390" y="19555205"/>
-              <a:ext cx="5032291" cy="523220"/>
-            </a:xfrm>
-            <a:prstGeom prst="rect">
-              <a:avLst/>
-            </a:prstGeom>
-            <a:noFill/>
-          </p:spPr>
-          <p:txBody>
-            <a:bodyPr wrap="square" rtlCol="0">
-              <a:spAutoFit/>
-            </a:bodyPr>
-            <a:lstStyle/>
-            <a:p>
-              <a:pPr algn="ctr"/>
-              <a:r>
-                <a:rPr lang="en-US" sz="2800" dirty="0"/>
-                <a:t>Chromosome size (Mb)</a:t>
-              </a:r>
-            </a:p>
-          </p:txBody>
-        </p:sp>
-      </p:grpSp>
       <p:pic>
         <p:nvPicPr>
           <p:cNvPr id="9" name="Graphic 8">
@@ -13788,10 +12968,10 @@
           <p:nvPr/>
         </p:nvPicPr>
         <p:blipFill>
-          <a:blip r:embed="rId15">
+          <a:blip>
             <a:extLst>
               <a:ext uri="{96DAC541-7B7A-43D3-8B79-37D633B846F1}">
-                <asvg:svgBlip xmlns:asvg="http://schemas.microsoft.com/office/drawing/2016/SVG/main" r:embed="rId16"/>
+                <asvg:svgBlip xmlns:asvg="http://schemas.microsoft.com/office/drawing/2016/SVG/main" r:embed="rId4"/>
               </a:ext>
             </a:extLst>
           </a:blip>
@@ -13824,10 +13004,10 @@
           <p:nvPr/>
         </p:nvPicPr>
         <p:blipFill>
-          <a:blip r:embed="rId17">
+          <a:blip>
             <a:extLst>
               <a:ext uri="{96DAC541-7B7A-43D3-8B79-37D633B846F1}">
-                <asvg:svgBlip xmlns:asvg="http://schemas.microsoft.com/office/drawing/2016/SVG/main" r:embed="rId18"/>
+                <asvg:svgBlip xmlns:asvg="http://schemas.microsoft.com/office/drawing/2016/SVG/main" r:embed="rId5"/>
               </a:ext>
             </a:extLst>
           </a:blip>
@@ -13845,94 +13025,6 @@
           </a:prstGeom>
         </p:spPr>
       </p:pic>
-      <p:sp>
-        <p:nvSpPr>
-          <p:cNvPr id="14" name="TextBox 13">
-            <a:extLst>
-              <a:ext uri="{FF2B5EF4-FFF2-40B4-BE49-F238E27FC236}">
-                <a16:creationId xmlns:a16="http://schemas.microsoft.com/office/drawing/2014/main" id="{E06602AC-C6A6-E77F-69B9-79C468ECCC79}"/>
-              </a:ext>
-            </a:extLst>
-          </p:cNvPr>
-          <p:cNvSpPr txBox="1"/>
-          <p:nvPr/>
-        </p:nvSpPr>
-        <p:spPr>
-          <a:xfrm>
-            <a:off x="10515530" y="21466566"/>
-            <a:ext cx="6969387" cy="1169551"/>
-          </a:xfrm>
-          <a:prstGeom prst="rect">
-            <a:avLst/>
-          </a:prstGeom>
-          <a:noFill/>
-        </p:spPr>
-        <p:txBody>
-          <a:bodyPr wrap="square" rtlCol="0">
-            <a:spAutoFit/>
-          </a:bodyPr>
-          <a:lstStyle/>
-          <a:p>
-            <a:pPr algn="ctr"/>
-            <a:r>
-              <a:rPr lang="en-US" sz="7000" dirty="0"/>
-              <a:t>R</a:t>
-            </a:r>
-            <a:r>
-              <a:rPr lang="en-US" sz="7000" baseline="30000" dirty="0"/>
-              <a:t>2</a:t>
-            </a:r>
-            <a:r>
-              <a:rPr lang="en-US" sz="7000" dirty="0"/>
-              <a:t> = 0.90</a:t>
-            </a:r>
-          </a:p>
-        </p:txBody>
-      </p:sp>
-      <p:sp>
-        <p:nvSpPr>
-          <p:cNvPr id="20" name="TextBox 19">
-            <a:extLst>
-              <a:ext uri="{FF2B5EF4-FFF2-40B4-BE49-F238E27FC236}">
-                <a16:creationId xmlns:a16="http://schemas.microsoft.com/office/drawing/2014/main" id="{4E1986F3-E9CE-204F-265D-2825D3DA858B}"/>
-              </a:ext>
-            </a:extLst>
-          </p:cNvPr>
-          <p:cNvSpPr txBox="1"/>
-          <p:nvPr/>
-        </p:nvSpPr>
-        <p:spPr>
-          <a:xfrm>
-            <a:off x="22268963" y="17109564"/>
-            <a:ext cx="6364938" cy="1169551"/>
-          </a:xfrm>
-          <a:prstGeom prst="rect">
-            <a:avLst/>
-          </a:prstGeom>
-          <a:noFill/>
-        </p:spPr>
-        <p:txBody>
-          <a:bodyPr wrap="square" rtlCol="0">
-            <a:spAutoFit/>
-          </a:bodyPr>
-          <a:lstStyle/>
-          <a:p>
-            <a:pPr algn="ctr"/>
-            <a:r>
-              <a:rPr lang="en-US" sz="7000" dirty="0"/>
-              <a:t>R</a:t>
-            </a:r>
-            <a:r>
-              <a:rPr lang="en-US" sz="7000" baseline="30000" dirty="0"/>
-              <a:t>2</a:t>
-            </a:r>
-            <a:r>
-              <a:rPr lang="en-US" sz="7000" dirty="0"/>
-              <a:t> = 0.34</a:t>
-            </a:r>
-          </a:p>
-        </p:txBody>
-      </p:sp>
       <p:sp>
         <p:nvSpPr>
           <p:cNvPr id="8" name="TextBox 7">
@@ -14005,88 +13097,727 @@
           </a:p>
         </p:txBody>
       </p:sp>
-    </p:spTree>
-  </p:cSld>
-  <p:clrMapOvr>
-    <a:masterClrMapping/>
-  </p:clrMapOvr>
-</p:sld>
-</file>
-
-<file path=ppt/slides/slide2.xml><?xml version="1.0" encoding="utf-8"?>
-<p:sld xmlns:a="http://schemas.openxmlformats.org/drawingml/2006/main" xmlns:r="http://schemas.openxmlformats.org/officeDocument/2006/relationships" xmlns:p="http://schemas.openxmlformats.org/presentationml/2006/main">
-  <p:cSld>
-    <p:bg>
-      <p:bgPr>
-        <a:solidFill>
-          <a:schemeClr val="lt1"/>
-        </a:solidFill>
-        <a:effectLst/>
-      </p:bgPr>
-    </p:bg>
-    <p:spTree>
-      <p:nvGrpSpPr>
-        <p:cNvPr id="1" name="Shape 88">
-          <a:extLst>
-            <a:ext uri="{FF2B5EF4-FFF2-40B4-BE49-F238E27FC236}">
-              <a16:creationId xmlns:a16="http://schemas.microsoft.com/office/drawing/2014/main" id="{DB6041BE-7EEB-832C-5DBE-D4E76D7FBF94}"/>
-            </a:ext>
-          </a:extLst>
-        </p:cNvPr>
-        <p:cNvGrpSpPr/>
-        <p:nvPr/>
-      </p:nvGrpSpPr>
-      <p:grpSpPr>
-        <a:xfrm>
-          <a:off x="0" y="0"/>
-          <a:ext cx="0" cy="0"/>
-          <a:chOff x="0" y="0"/>
-          <a:chExt cx="0" cy="0"/>
-        </a:xfrm>
-      </p:grpSpPr>
-      <p:pic>
-        <p:nvPicPr>
-          <p:cNvPr id="4" name="Graphic 3">
+      <p:sp>
+        <p:nvSpPr>
+          <p:cNvPr id="3" name="TextBox 2">
             <a:extLst>
               <a:ext uri="{FF2B5EF4-FFF2-40B4-BE49-F238E27FC236}">
-                <a16:creationId xmlns:a16="http://schemas.microsoft.com/office/drawing/2014/main" id="{0D1688A4-19B5-CC5F-2F4B-C7F92DC33540}"/>
+                <a16:creationId xmlns:a16="http://schemas.microsoft.com/office/drawing/2014/main" id="{2CB3C4C3-8648-C968-83C4-B34ABEDFC8AE}"/>
               </a:ext>
             </a:extLst>
           </p:cNvPr>
-          <p:cNvPicPr>
-            <a:picLocks noChangeAspect="1"/>
-          </p:cNvPicPr>
+          <p:cNvSpPr txBox="1"/>
           <p:nvPr/>
-        </p:nvPicPr>
-        <p:blipFill>
-          <a:blip r:embed="rId3">
-            <a:extLst>
-              <a:ext uri="{96DAC541-7B7A-43D3-8B79-37D633B846F1}">
-                <asvg:svgBlip xmlns:asvg="http://schemas.microsoft.com/office/drawing/2016/SVG/main" r:embed="rId4"/>
-              </a:ext>
-            </a:extLst>
-          </a:blip>
-          <a:srcRect l="1607" t="35119" r="9823" b="1984"/>
-          <a:stretch>
-            <a:fillRect/>
-          </a:stretch>
-        </p:blipFill>
+        </p:nvSpPr>
         <p:spPr>
           <a:xfrm>
-            <a:off x="0" y="9542205"/>
-            <a:ext cx="36576000" cy="23376195"/>
+            <a:off x="2299293" y="11813345"/>
+            <a:ext cx="2179856" cy="1200329"/>
           </a:xfrm>
           <a:prstGeom prst="rect">
             <a:avLst/>
           </a:prstGeom>
+          <a:noFill/>
         </p:spPr>
-      </p:pic>
+        <p:txBody>
+          <a:bodyPr wrap="square" rtlCol="0">
+            <a:spAutoFit/>
+          </a:bodyPr>
+          <a:lstStyle/>
+          <a:p>
+            <a:pPr algn="ctr"/>
+            <a:r>
+              <a:rPr lang="en-US" sz="7200" dirty="0"/>
+              <a:t>3</a:t>
+            </a:r>
+          </a:p>
+        </p:txBody>
+      </p:sp>
+      <p:sp>
+        <p:nvSpPr>
+          <p:cNvPr id="5" name="TextBox 4">
+            <a:extLst>
+              <a:ext uri="{FF2B5EF4-FFF2-40B4-BE49-F238E27FC236}">
+                <a16:creationId xmlns:a16="http://schemas.microsoft.com/office/drawing/2014/main" id="{2741DF6E-BD34-6766-6945-E3B805E3ACA3}"/>
+              </a:ext>
+            </a:extLst>
+          </p:cNvPr>
+          <p:cNvSpPr txBox="1"/>
+          <p:nvPr/>
+        </p:nvSpPr>
+        <p:spPr>
+          <a:xfrm>
+            <a:off x="2299290" y="14525376"/>
+            <a:ext cx="2179856" cy="1200329"/>
+          </a:xfrm>
+          <a:prstGeom prst="rect">
+            <a:avLst/>
+          </a:prstGeom>
+          <a:noFill/>
+        </p:spPr>
+        <p:txBody>
+          <a:bodyPr wrap="square" rtlCol="0">
+            <a:spAutoFit/>
+          </a:bodyPr>
+          <a:lstStyle/>
+          <a:p>
+            <a:pPr algn="ctr"/>
+            <a:r>
+              <a:rPr lang="en-US" sz="7200" dirty="0"/>
+              <a:t>2.5</a:t>
+            </a:r>
+          </a:p>
+        </p:txBody>
+      </p:sp>
+      <p:sp>
+        <p:nvSpPr>
+          <p:cNvPr id="7" name="TextBox 6">
+            <a:extLst>
+              <a:ext uri="{FF2B5EF4-FFF2-40B4-BE49-F238E27FC236}">
+                <a16:creationId xmlns:a16="http://schemas.microsoft.com/office/drawing/2014/main" id="{FBE6EEBD-BCE9-06FA-7519-F9E43213F71E}"/>
+              </a:ext>
+            </a:extLst>
+          </p:cNvPr>
+          <p:cNvSpPr txBox="1"/>
+          <p:nvPr/>
+        </p:nvSpPr>
+        <p:spPr>
+          <a:xfrm>
+            <a:off x="2299290" y="17232858"/>
+            <a:ext cx="2179856" cy="1200329"/>
+          </a:xfrm>
+          <a:prstGeom prst="rect">
+            <a:avLst/>
+          </a:prstGeom>
+          <a:noFill/>
+        </p:spPr>
+        <p:txBody>
+          <a:bodyPr wrap="square" rtlCol="0">
+            <a:spAutoFit/>
+          </a:bodyPr>
+          <a:lstStyle/>
+          <a:p>
+            <a:pPr algn="ctr"/>
+            <a:r>
+              <a:rPr lang="en-US" sz="7200" dirty="0"/>
+              <a:t>2</a:t>
+            </a:r>
+          </a:p>
+        </p:txBody>
+      </p:sp>
+      <p:sp>
+        <p:nvSpPr>
+          <p:cNvPr id="11" name="TextBox 10">
+            <a:extLst>
+              <a:ext uri="{FF2B5EF4-FFF2-40B4-BE49-F238E27FC236}">
+                <a16:creationId xmlns:a16="http://schemas.microsoft.com/office/drawing/2014/main" id="{67B1AF70-498C-1FB2-8DDC-1D3A57F8CBA3}"/>
+              </a:ext>
+            </a:extLst>
+          </p:cNvPr>
+          <p:cNvSpPr txBox="1"/>
+          <p:nvPr/>
+        </p:nvSpPr>
+        <p:spPr>
+          <a:xfrm>
+            <a:off x="2299291" y="19940340"/>
+            <a:ext cx="2179856" cy="1200329"/>
+          </a:xfrm>
+          <a:prstGeom prst="rect">
+            <a:avLst/>
+          </a:prstGeom>
+          <a:noFill/>
+        </p:spPr>
+        <p:txBody>
+          <a:bodyPr wrap="square" rtlCol="0">
+            <a:spAutoFit/>
+          </a:bodyPr>
+          <a:lstStyle/>
+          <a:p>
+            <a:pPr algn="ctr"/>
+            <a:r>
+              <a:rPr lang="en-US" sz="7200" dirty="0"/>
+              <a:t>1.5</a:t>
+            </a:r>
+          </a:p>
+        </p:txBody>
+      </p:sp>
+      <p:sp>
+        <p:nvSpPr>
+          <p:cNvPr id="14" name="TextBox 13">
+            <a:extLst>
+              <a:ext uri="{FF2B5EF4-FFF2-40B4-BE49-F238E27FC236}">
+                <a16:creationId xmlns:a16="http://schemas.microsoft.com/office/drawing/2014/main" id="{946C87E8-9B57-A50C-35FF-86A91231767F}"/>
+              </a:ext>
+            </a:extLst>
+          </p:cNvPr>
+          <p:cNvSpPr txBox="1"/>
+          <p:nvPr/>
+        </p:nvSpPr>
+        <p:spPr>
+          <a:xfrm>
+            <a:off x="2299294" y="22650204"/>
+            <a:ext cx="2179856" cy="1200329"/>
+          </a:xfrm>
+          <a:prstGeom prst="rect">
+            <a:avLst/>
+          </a:prstGeom>
+          <a:noFill/>
+        </p:spPr>
+        <p:txBody>
+          <a:bodyPr wrap="square" rtlCol="0">
+            <a:spAutoFit/>
+          </a:bodyPr>
+          <a:lstStyle/>
+          <a:p>
+            <a:pPr algn="ctr"/>
+            <a:r>
+              <a:rPr lang="en-US" sz="7200" dirty="0"/>
+              <a:t>1</a:t>
+            </a:r>
+          </a:p>
+        </p:txBody>
+      </p:sp>
+      <p:sp>
+        <p:nvSpPr>
+          <p:cNvPr id="20" name="TextBox 19">
+            <a:extLst>
+              <a:ext uri="{FF2B5EF4-FFF2-40B4-BE49-F238E27FC236}">
+                <a16:creationId xmlns:a16="http://schemas.microsoft.com/office/drawing/2014/main" id="{6F1822BD-B799-EF05-0FF7-2CBC751E244B}"/>
+              </a:ext>
+            </a:extLst>
+          </p:cNvPr>
+          <p:cNvSpPr txBox="1"/>
+          <p:nvPr/>
+        </p:nvSpPr>
+        <p:spPr>
+          <a:xfrm>
+            <a:off x="2299293" y="25357669"/>
+            <a:ext cx="2179856" cy="1200329"/>
+          </a:xfrm>
+          <a:prstGeom prst="rect">
+            <a:avLst/>
+          </a:prstGeom>
+          <a:noFill/>
+        </p:spPr>
+        <p:txBody>
+          <a:bodyPr wrap="square" rtlCol="0">
+            <a:spAutoFit/>
+          </a:bodyPr>
+          <a:lstStyle/>
+          <a:p>
+            <a:pPr algn="ctr"/>
+            <a:r>
+              <a:rPr lang="en-US" sz="7200" dirty="0"/>
+              <a:t>0.5</a:t>
+            </a:r>
+          </a:p>
+        </p:txBody>
+      </p:sp>
+      <p:sp>
+        <p:nvSpPr>
+          <p:cNvPr id="23" name="TextBox 22">
+            <a:extLst>
+              <a:ext uri="{FF2B5EF4-FFF2-40B4-BE49-F238E27FC236}">
+                <a16:creationId xmlns:a16="http://schemas.microsoft.com/office/drawing/2014/main" id="{E8CEFFF4-BB0B-7FB5-71AD-5048FD7F099D}"/>
+              </a:ext>
+            </a:extLst>
+          </p:cNvPr>
+          <p:cNvSpPr txBox="1"/>
+          <p:nvPr/>
+        </p:nvSpPr>
+        <p:spPr>
+          <a:xfrm>
+            <a:off x="4390569" y="28743807"/>
+            <a:ext cx="2179856" cy="1200329"/>
+          </a:xfrm>
+          <a:prstGeom prst="rect">
+            <a:avLst/>
+          </a:prstGeom>
+          <a:noFill/>
+        </p:spPr>
+        <p:txBody>
+          <a:bodyPr wrap="square" rtlCol="0">
+            <a:spAutoFit/>
+          </a:bodyPr>
+          <a:lstStyle/>
+          <a:p>
+            <a:pPr algn="ctr"/>
+            <a:r>
+              <a:rPr lang="en-US" sz="7200" dirty="0"/>
+              <a:t>0</a:t>
+            </a:r>
+          </a:p>
+        </p:txBody>
+      </p:sp>
+      <p:sp>
+        <p:nvSpPr>
+          <p:cNvPr id="24" name="TextBox 23">
+            <a:extLst>
+              <a:ext uri="{FF2B5EF4-FFF2-40B4-BE49-F238E27FC236}">
+                <a16:creationId xmlns:a16="http://schemas.microsoft.com/office/drawing/2014/main" id="{7A3365D2-80EA-4E94-83A5-A5CE5B41F7F8}"/>
+              </a:ext>
+            </a:extLst>
+          </p:cNvPr>
+          <p:cNvSpPr txBox="1"/>
+          <p:nvPr/>
+        </p:nvSpPr>
+        <p:spPr>
+          <a:xfrm>
+            <a:off x="6740069" y="28743806"/>
+            <a:ext cx="2179856" cy="1200329"/>
+          </a:xfrm>
+          <a:prstGeom prst="rect">
+            <a:avLst/>
+          </a:prstGeom>
+          <a:noFill/>
+        </p:spPr>
+        <p:txBody>
+          <a:bodyPr wrap="square" rtlCol="0">
+            <a:spAutoFit/>
+          </a:bodyPr>
+          <a:lstStyle/>
+          <a:p>
+            <a:pPr algn="ctr"/>
+            <a:r>
+              <a:rPr lang="en-US" sz="7200" dirty="0"/>
+              <a:t>50</a:t>
+            </a:r>
+          </a:p>
+        </p:txBody>
+      </p:sp>
+      <p:sp>
+        <p:nvSpPr>
+          <p:cNvPr id="25" name="TextBox 24">
+            <a:extLst>
+              <a:ext uri="{FF2B5EF4-FFF2-40B4-BE49-F238E27FC236}">
+                <a16:creationId xmlns:a16="http://schemas.microsoft.com/office/drawing/2014/main" id="{4AA48AB6-1449-B956-8625-FFE5BE9F9ED6}"/>
+              </a:ext>
+            </a:extLst>
+          </p:cNvPr>
+          <p:cNvSpPr txBox="1"/>
+          <p:nvPr/>
+        </p:nvSpPr>
+        <p:spPr>
+          <a:xfrm>
+            <a:off x="9089569" y="28743806"/>
+            <a:ext cx="2179856" cy="1200329"/>
+          </a:xfrm>
+          <a:prstGeom prst="rect">
+            <a:avLst/>
+          </a:prstGeom>
+          <a:noFill/>
+        </p:spPr>
+        <p:txBody>
+          <a:bodyPr wrap="square" rtlCol="0">
+            <a:spAutoFit/>
+          </a:bodyPr>
+          <a:lstStyle/>
+          <a:p>
+            <a:pPr algn="ctr"/>
+            <a:r>
+              <a:rPr lang="en-US" sz="7200" dirty="0"/>
+              <a:t>100</a:t>
+            </a:r>
+          </a:p>
+        </p:txBody>
+      </p:sp>
+      <p:sp>
+        <p:nvSpPr>
+          <p:cNvPr id="26" name="TextBox 25">
+            <a:extLst>
+              <a:ext uri="{FF2B5EF4-FFF2-40B4-BE49-F238E27FC236}">
+                <a16:creationId xmlns:a16="http://schemas.microsoft.com/office/drawing/2014/main" id="{8E781169-A1F4-3A10-D5B0-55C6D2CDF57D}"/>
+              </a:ext>
+            </a:extLst>
+          </p:cNvPr>
+          <p:cNvSpPr txBox="1"/>
+          <p:nvPr/>
+        </p:nvSpPr>
+        <p:spPr>
+          <a:xfrm>
+            <a:off x="11438718" y="28743805"/>
+            <a:ext cx="2179856" cy="1200329"/>
+          </a:xfrm>
+          <a:prstGeom prst="rect">
+            <a:avLst/>
+          </a:prstGeom>
+          <a:noFill/>
+        </p:spPr>
+        <p:txBody>
+          <a:bodyPr wrap="square" rtlCol="0">
+            <a:spAutoFit/>
+          </a:bodyPr>
+          <a:lstStyle/>
+          <a:p>
+            <a:pPr algn="ctr"/>
+            <a:r>
+              <a:rPr lang="en-US" sz="7200" dirty="0"/>
+              <a:t>150</a:t>
+            </a:r>
+          </a:p>
+        </p:txBody>
+      </p:sp>
+      <p:sp>
+        <p:nvSpPr>
+          <p:cNvPr id="27" name="TextBox 26">
+            <a:extLst>
+              <a:ext uri="{FF2B5EF4-FFF2-40B4-BE49-F238E27FC236}">
+                <a16:creationId xmlns:a16="http://schemas.microsoft.com/office/drawing/2014/main" id="{CD2CBA12-87B3-F599-DB5C-E38CAC043871}"/>
+              </a:ext>
+            </a:extLst>
+          </p:cNvPr>
+          <p:cNvSpPr txBox="1"/>
+          <p:nvPr/>
+        </p:nvSpPr>
+        <p:spPr>
+          <a:xfrm>
+            <a:off x="13790248" y="28743804"/>
+            <a:ext cx="2179856" cy="1200329"/>
+          </a:xfrm>
+          <a:prstGeom prst="rect">
+            <a:avLst/>
+          </a:prstGeom>
+          <a:noFill/>
+        </p:spPr>
+        <p:txBody>
+          <a:bodyPr wrap="square" rtlCol="0">
+            <a:spAutoFit/>
+          </a:bodyPr>
+          <a:lstStyle/>
+          <a:p>
+            <a:pPr algn="ctr"/>
+            <a:r>
+              <a:rPr lang="en-US" sz="7200" dirty="0"/>
+              <a:t>200</a:t>
+            </a:r>
+          </a:p>
+        </p:txBody>
+      </p:sp>
+      <p:sp>
+        <p:nvSpPr>
+          <p:cNvPr id="28" name="TextBox 27">
+            <a:extLst>
+              <a:ext uri="{FF2B5EF4-FFF2-40B4-BE49-F238E27FC236}">
+                <a16:creationId xmlns:a16="http://schemas.microsoft.com/office/drawing/2014/main" id="{DABCFD0A-6D7C-6CB8-A103-7C971C9B703F}"/>
+              </a:ext>
+            </a:extLst>
+          </p:cNvPr>
+          <p:cNvSpPr txBox="1"/>
+          <p:nvPr/>
+        </p:nvSpPr>
+        <p:spPr>
+          <a:xfrm>
+            <a:off x="16137017" y="28743803"/>
+            <a:ext cx="2179856" cy="1200329"/>
+          </a:xfrm>
+          <a:prstGeom prst="rect">
+            <a:avLst/>
+          </a:prstGeom>
+          <a:noFill/>
+        </p:spPr>
+        <p:txBody>
+          <a:bodyPr wrap="square" rtlCol="0">
+            <a:spAutoFit/>
+          </a:bodyPr>
+          <a:lstStyle/>
+          <a:p>
+            <a:pPr algn="ctr"/>
+            <a:r>
+              <a:rPr lang="en-US" sz="7200" dirty="0"/>
+              <a:t>250</a:t>
+            </a:r>
+          </a:p>
+        </p:txBody>
+      </p:sp>
+      <p:sp>
+        <p:nvSpPr>
+          <p:cNvPr id="29" name="TextBox 28">
+            <a:extLst>
+              <a:ext uri="{FF2B5EF4-FFF2-40B4-BE49-F238E27FC236}">
+                <a16:creationId xmlns:a16="http://schemas.microsoft.com/office/drawing/2014/main" id="{39AFFBA9-05BA-6A75-9AAB-00B113396712}"/>
+              </a:ext>
+            </a:extLst>
+          </p:cNvPr>
+          <p:cNvSpPr txBox="1"/>
+          <p:nvPr/>
+        </p:nvSpPr>
+        <p:spPr>
+          <a:xfrm>
+            <a:off x="19240139" y="28743803"/>
+            <a:ext cx="2179856" cy="1200329"/>
+          </a:xfrm>
+          <a:prstGeom prst="rect">
+            <a:avLst/>
+          </a:prstGeom>
+          <a:noFill/>
+        </p:spPr>
+        <p:txBody>
+          <a:bodyPr wrap="square" rtlCol="0">
+            <a:spAutoFit/>
+          </a:bodyPr>
+          <a:lstStyle/>
+          <a:p>
+            <a:pPr algn="ctr"/>
+            <a:r>
+              <a:rPr lang="en-US" sz="7200" dirty="0"/>
+              <a:t>0</a:t>
+            </a:r>
+          </a:p>
+        </p:txBody>
+      </p:sp>
+      <p:sp>
+        <p:nvSpPr>
+          <p:cNvPr id="30" name="TextBox 29">
+            <a:extLst>
+              <a:ext uri="{FF2B5EF4-FFF2-40B4-BE49-F238E27FC236}">
+                <a16:creationId xmlns:a16="http://schemas.microsoft.com/office/drawing/2014/main" id="{98A67D50-5F3A-EA2F-37AA-D2C47C5775BD}"/>
+              </a:ext>
+            </a:extLst>
+          </p:cNvPr>
+          <p:cNvSpPr txBox="1"/>
+          <p:nvPr/>
+        </p:nvSpPr>
+        <p:spPr>
+          <a:xfrm>
+            <a:off x="21590341" y="28743803"/>
+            <a:ext cx="2179856" cy="1200329"/>
+          </a:xfrm>
+          <a:prstGeom prst="rect">
+            <a:avLst/>
+          </a:prstGeom>
+          <a:noFill/>
+        </p:spPr>
+        <p:txBody>
+          <a:bodyPr wrap="square" rtlCol="0">
+            <a:spAutoFit/>
+          </a:bodyPr>
+          <a:lstStyle/>
+          <a:p>
+            <a:pPr algn="ctr"/>
+            <a:r>
+              <a:rPr lang="en-US" sz="7200" dirty="0"/>
+              <a:t>50</a:t>
+            </a:r>
+          </a:p>
+        </p:txBody>
+      </p:sp>
+      <p:sp>
+        <p:nvSpPr>
+          <p:cNvPr id="31" name="TextBox 30">
+            <a:extLst>
+              <a:ext uri="{FF2B5EF4-FFF2-40B4-BE49-F238E27FC236}">
+                <a16:creationId xmlns:a16="http://schemas.microsoft.com/office/drawing/2014/main" id="{D68A40AE-195D-A645-E272-8BD5C80915B5}"/>
+              </a:ext>
+            </a:extLst>
+          </p:cNvPr>
+          <p:cNvSpPr txBox="1"/>
+          <p:nvPr/>
+        </p:nvSpPr>
+        <p:spPr>
+          <a:xfrm>
+            <a:off x="23936407" y="28743803"/>
+            <a:ext cx="2179856" cy="1200329"/>
+          </a:xfrm>
+          <a:prstGeom prst="rect">
+            <a:avLst/>
+          </a:prstGeom>
+          <a:noFill/>
+        </p:spPr>
+        <p:txBody>
+          <a:bodyPr wrap="square" rtlCol="0">
+            <a:spAutoFit/>
+          </a:bodyPr>
+          <a:lstStyle/>
+          <a:p>
+            <a:pPr algn="ctr"/>
+            <a:r>
+              <a:rPr lang="en-US" sz="7200" dirty="0"/>
+              <a:t>100</a:t>
+            </a:r>
+          </a:p>
+        </p:txBody>
+      </p:sp>
+      <p:sp>
+        <p:nvSpPr>
+          <p:cNvPr id="32" name="TextBox 31">
+            <a:extLst>
+              <a:ext uri="{FF2B5EF4-FFF2-40B4-BE49-F238E27FC236}">
+                <a16:creationId xmlns:a16="http://schemas.microsoft.com/office/drawing/2014/main" id="{9600AB57-592B-C0F1-258E-A26833A7427A}"/>
+              </a:ext>
+            </a:extLst>
+          </p:cNvPr>
+          <p:cNvSpPr txBox="1"/>
+          <p:nvPr/>
+        </p:nvSpPr>
+        <p:spPr>
+          <a:xfrm>
+            <a:off x="26289346" y="28743803"/>
+            <a:ext cx="2179856" cy="1200329"/>
+          </a:xfrm>
+          <a:prstGeom prst="rect">
+            <a:avLst/>
+          </a:prstGeom>
+          <a:noFill/>
+        </p:spPr>
+        <p:txBody>
+          <a:bodyPr wrap="square" rtlCol="0">
+            <a:spAutoFit/>
+          </a:bodyPr>
+          <a:lstStyle/>
+          <a:p>
+            <a:pPr algn="ctr"/>
+            <a:r>
+              <a:rPr lang="en-US" sz="7200" dirty="0"/>
+              <a:t>150</a:t>
+            </a:r>
+          </a:p>
+        </p:txBody>
+      </p:sp>
+      <p:sp>
+        <p:nvSpPr>
+          <p:cNvPr id="33" name="TextBox 32">
+            <a:extLst>
+              <a:ext uri="{FF2B5EF4-FFF2-40B4-BE49-F238E27FC236}">
+                <a16:creationId xmlns:a16="http://schemas.microsoft.com/office/drawing/2014/main" id="{2097B315-5F53-18C7-F021-964F2BE29155}"/>
+              </a:ext>
+            </a:extLst>
+          </p:cNvPr>
+          <p:cNvSpPr txBox="1"/>
+          <p:nvPr/>
+        </p:nvSpPr>
+        <p:spPr>
+          <a:xfrm>
+            <a:off x="28637084" y="28743803"/>
+            <a:ext cx="2179856" cy="1200329"/>
+          </a:xfrm>
+          <a:prstGeom prst="rect">
+            <a:avLst/>
+          </a:prstGeom>
+          <a:noFill/>
+        </p:spPr>
+        <p:txBody>
+          <a:bodyPr wrap="square" rtlCol="0">
+            <a:spAutoFit/>
+          </a:bodyPr>
+          <a:lstStyle/>
+          <a:p>
+            <a:pPr algn="ctr"/>
+            <a:r>
+              <a:rPr lang="en-US" sz="7200" dirty="0"/>
+              <a:t>200</a:t>
+            </a:r>
+          </a:p>
+        </p:txBody>
+      </p:sp>
+      <p:sp>
+        <p:nvSpPr>
+          <p:cNvPr id="34" name="TextBox 33">
+            <a:extLst>
+              <a:ext uri="{FF2B5EF4-FFF2-40B4-BE49-F238E27FC236}">
+                <a16:creationId xmlns:a16="http://schemas.microsoft.com/office/drawing/2014/main" id="{08110294-A311-307C-B653-CF4325941233}"/>
+              </a:ext>
+            </a:extLst>
+          </p:cNvPr>
+          <p:cNvSpPr txBox="1"/>
+          <p:nvPr/>
+        </p:nvSpPr>
+        <p:spPr>
+          <a:xfrm>
+            <a:off x="30986013" y="28743803"/>
+            <a:ext cx="2179856" cy="1200329"/>
+          </a:xfrm>
+          <a:prstGeom prst="rect">
+            <a:avLst/>
+          </a:prstGeom>
+          <a:noFill/>
+        </p:spPr>
+        <p:txBody>
+          <a:bodyPr wrap="square" rtlCol="0">
+            <a:spAutoFit/>
+          </a:bodyPr>
+          <a:lstStyle/>
+          <a:p>
+            <a:pPr algn="ctr"/>
+            <a:r>
+              <a:rPr lang="en-US" sz="7200" dirty="0"/>
+              <a:t>250</a:t>
+            </a:r>
+          </a:p>
+        </p:txBody>
+      </p:sp>
+      <p:sp>
+        <p:nvSpPr>
+          <p:cNvPr id="35" name="TextBox 34">
+            <a:extLst>
+              <a:ext uri="{FF2B5EF4-FFF2-40B4-BE49-F238E27FC236}">
+                <a16:creationId xmlns:a16="http://schemas.microsoft.com/office/drawing/2014/main" id="{A294F6F5-CEAE-EC1F-F446-779B6D188713}"/>
+              </a:ext>
+            </a:extLst>
+          </p:cNvPr>
+          <p:cNvSpPr txBox="1"/>
+          <p:nvPr/>
+        </p:nvSpPr>
+        <p:spPr>
+          <a:xfrm rot="16200000">
+            <a:off x="-4465099" y="19340175"/>
+            <a:ext cx="11605270" cy="1200329"/>
+          </a:xfrm>
+          <a:prstGeom prst="rect">
+            <a:avLst/>
+          </a:prstGeom>
+          <a:noFill/>
+        </p:spPr>
+        <p:txBody>
+          <a:bodyPr wrap="square" rtlCol="0">
+            <a:spAutoFit/>
+          </a:bodyPr>
+          <a:lstStyle/>
+          <a:p>
+            <a:pPr algn="ctr"/>
+            <a:r>
+              <a:rPr lang="en-US" sz="7200" dirty="0"/>
+              <a:t>Gene count (thousands)</a:t>
+            </a:r>
+          </a:p>
+        </p:txBody>
+      </p:sp>
+      <p:sp>
+        <p:nvSpPr>
+          <p:cNvPr id="36" name="TextBox 35">
+            <a:extLst>
+              <a:ext uri="{FF2B5EF4-FFF2-40B4-BE49-F238E27FC236}">
+                <a16:creationId xmlns:a16="http://schemas.microsoft.com/office/drawing/2014/main" id="{E18F7F8A-071E-8605-B44B-BDD74CA77F2B}"/>
+              </a:ext>
+            </a:extLst>
+          </p:cNvPr>
+          <p:cNvSpPr txBox="1"/>
+          <p:nvPr/>
+        </p:nvSpPr>
+        <p:spPr>
+          <a:xfrm>
+            <a:off x="12861075" y="30678700"/>
+            <a:ext cx="11605270" cy="1200329"/>
+          </a:xfrm>
+          <a:prstGeom prst="rect">
+            <a:avLst/>
+          </a:prstGeom>
+          <a:noFill/>
+        </p:spPr>
+        <p:txBody>
+          <a:bodyPr wrap="square" rtlCol="0">
+            <a:spAutoFit/>
+          </a:bodyPr>
+          <a:lstStyle/>
+          <a:p>
+            <a:pPr algn="ctr"/>
+            <a:r>
+              <a:rPr lang="en-US" sz="7200" dirty="0"/>
+              <a:t>Chromosome size (Mb)</a:t>
+            </a:r>
+          </a:p>
+        </p:txBody>
+      </p:sp>
     </p:spTree>
-    <p:extLst>
-      <p:ext uri="{BB962C8B-B14F-4D97-AF65-F5344CB8AC3E}">
-        <p14:creationId xmlns:p14="http://schemas.microsoft.com/office/powerpoint/2010/main" val="2765723133"/>
-      </p:ext>
-    </p:extLst>
   </p:cSld>
   <p:clrMapOvr>
     <a:masterClrMapping/>
